--- a/content/decks/media-studies/media-studies-s1-lesson-09-the-gaze.pptx
+++ b/content/decks/media-studies/media-studies-s1-lesson-09-the-gaze.pptx
@@ -1041,7 +1041,7 @@
           <a:p>
             <a:r>
               <a:rPr lang="en-US" dirty="0"/>
-              <a:t>The barmaid's gaze and the impossible reflection make the looking refuse to resolve: a painting about who looks at whom.</a:t>
+              <a:t>The mirror does not add up and the barmaid looks past us. Manet painted the problem the week is about: who looks at whom.</a:t>
             </a:r>
             <a:endParaRPr lang="en-US" dirty="0"/>
           </a:p>
@@ -1481,7 +1481,7 @@
           <a:p>
             <a:r>
               <a:rPr lang="en-US" dirty="0"/>
-              <a:t>Olympia's direct, unashamed stare returns the viewer's look: the canonical returned gaze, and a bridge to hooks's oppositional gaze.</a:t>
+              <a:t>Olympia stares straight back and returns the viewer's look. Use it as the bridge to hooks and the oppositional gaze.</a:t>
             </a:r>
             <a:endParaRPr lang="en-US" dirty="0"/>
           </a:p>
@@ -2342,7 +2342,7 @@
                 <a:ea typeface="Georgia" pitchFamily="34" charset="-122"/>
                 <a:cs typeface="Georgia" pitchFamily="34" charset="-120"/>
               </a:rPr>
-              <a:t>bell hooks flips the week's question. Not how does the text look at its subjects, but who was this looking built for, and what happens when someone else does the looking? Refusal and rereading are critical acts. The oppositional gaze looks back at a text that never expected you to be watching.</a:t>
+              <a:t>bell hooks flips the week's question. Not how the text looks at its subjects, but who the looking was built for, and what happens when someone else does it. Refusing a text, and reading it again against itself, is critical work. The oppositional gaze looks back at a text that never expected you to be watching.</a:t>
             </a:r>
             <a:endParaRPr lang="en-US" sz="2000" dirty="0"/>
           </a:p>
@@ -2694,8 +2694,8 @@
         </p:nvSpPr>
         <p:spPr>
           <a:xfrm>
-            <a:off x="822960" y="4892040"/>
-            <a:ext cx="9875520" cy="457200"/>
+            <a:off x="822960" y="4846320"/>
+            <a:ext cx="9875520" cy="365760"/>
           </a:xfrm>
           <a:prstGeom prst="rect">
             <a:avLst/>
@@ -2711,7 +2711,7 @@
               <a:buNone/>
             </a:pPr>
             <a:r>
-              <a:rPr lang="en-US" sz="1300" i="1" dirty="0">
+              <a:rPr lang="en-US" sz="1250" i="1" dirty="0">
                 <a:solidFill>
                   <a:srgbClr val="7A7F72"/>
                 </a:solidFill>
@@ -2719,6 +2719,45 @@
                 <a:ea typeface="Arial" pitchFamily="34" charset="-122"/>
                 <a:cs typeface="Arial" pitchFamily="34" charset="-120"/>
               </a:rPr>
+              <a:t>Before scripts come in, a Smuggler Hunt: partners hunt for a decorated theorist, named but doing no work.</a:t>
+            </a:r>
+            <a:endParaRPr lang="en-US" sz="1250" dirty="0"/>
+          </a:p>
+        </p:txBody>
+      </p:sp>
+      <p:sp>
+        <p:nvSpPr>
+          <p:cNvPr id="9" name="Text 7"/>
+          <p:cNvSpPr/>
+          <p:nvPr/>
+        </p:nvSpPr>
+        <p:spPr>
+          <a:xfrm>
+            <a:off x="822960" y="5257800"/>
+            <a:ext cx="9875520" cy="457200"/>
+          </a:xfrm>
+          <a:prstGeom prst="rect">
+            <a:avLst/>
+          </a:prstGeom>
+          <a:noFill/>
+          <a:ln/>
+        </p:spPr>
+        <p:txBody>
+          <a:bodyPr wrap="square" lIns="0" tIns="0" rIns="0" bIns="0" rtlCol="0" anchor="ctr"/>
+          <a:lstStyle/>
+          <a:p>
+            <a:pPr indent="0" marL="0">
+              <a:buNone/>
+            </a:pPr>
+            <a:r>
+              <a:rPr lang="en-US" sz="1300" i="1" dirty="0">
+                <a:solidFill>
+                  <a:srgbClr val="7A7F72"/>
+                </a:solidFill>
+                <a:latin typeface="Arial" pitchFamily="34" charset="0"/>
+                <a:ea typeface="Arial" pitchFamily="34" charset="-122"/>
+                <a:cs typeface="Arial" pitchFamily="34" charset="-120"/>
+              </a:rPr>
               <a:t>A3 announced today: the complete C1 portfolio, due Friday 27 November, exactly 14 days.</a:t>
             </a:r>
             <a:endParaRPr lang="en-US" sz="1300" dirty="0"/>
@@ -2727,7 +2766,7 @@
       </p:sp>
       <p:sp>
         <p:nvSpPr>
-          <p:cNvPr id="9" name="Shape 7"/>
+          <p:cNvPr id="10" name="Shape 8"/>
           <p:cNvSpPr/>
           <p:nvPr/>
         </p:nvSpPr>
@@ -2750,7 +2789,7 @@
       </p:sp>
       <p:sp>
         <p:nvSpPr>
-          <p:cNvPr id="10" name="Text 8"/>
+          <p:cNvPr id="11" name="Text 9"/>
           <p:cNvSpPr/>
           <p:nvPr/>
         </p:nvSpPr>
@@ -2789,7 +2828,7 @@
       </p:sp>
       <p:sp>
         <p:nvSpPr>
-          <p:cNvPr id="11" name="Text 9"/>
+          <p:cNvPr id="12" name="Text 10"/>
           <p:cNvSpPr/>
           <p:nvPr/>
         </p:nvSpPr>
@@ -4137,7 +4176,7 @@
       </p:grpSpPr>
       <p:pic>
         <p:nvPicPr>
-          <p:cNvPr id="2" name="Image 0" descr="/private/tmp/claude-501/-Users-dogan-Documents-Vaults-Courses/a3a5132d-721f-4cd4-8ddd-e62e2b37b51b/scratchpad/img/crops/manet-folies_a1777.jpg">    </p:cNvPr>
+          <p:cNvPr id="2" name="Image 0" descr="/Users/dogan/Documents/Vaults/Courses/wiki/classes/media-studies/decks/_build/img/crops/manet-folies_a1777.jpg">    </p:cNvPr>
           <p:cNvPicPr>
             <a:picLocks noChangeAspect="1"/>
           </p:cNvPicPr>
@@ -5497,7 +5536,46 @@
       </p:sp>
       <p:sp>
         <p:nvSpPr>
-          <p:cNvPr id="8" name="Shape 6"/>
+          <p:cNvPr id="8" name="Text 6"/>
+          <p:cNvSpPr/>
+          <p:nvPr/>
+        </p:nvSpPr>
+        <p:spPr>
+          <a:xfrm>
+            <a:off x="822960" y="5120640"/>
+            <a:ext cx="9966960" cy="365760"/>
+          </a:xfrm>
+          <a:prstGeom prst="rect">
+            <a:avLst/>
+          </a:prstGeom>
+          <a:noFill/>
+          <a:ln/>
+        </p:spPr>
+        <p:txBody>
+          <a:bodyPr wrap="square" lIns="0" tIns="0" rIns="0" bIns="0" rtlCol="0" anchor="ctr"/>
+          <a:lstStyle/>
+          <a:p>
+            <a:pPr indent="0" marL="0">
+              <a:buNone/>
+            </a:pPr>
+            <a:r>
+              <a:rPr lang="en-US" sz="1250" i="1" dirty="0">
+                <a:solidFill>
+                  <a:srgbClr val="7A7F72"/>
+                </a:solidFill>
+                <a:latin typeface="Arial" pitchFamily="34" charset="0"/>
+                <a:ea typeface="Arial" pitchFamily="34" charset="-122"/>
+                <a:cs typeface="Arial" pitchFamily="34" charset="-120"/>
+              </a:rPr>
+              <a:t>Every verdict must survive one structured counter: challenger named in advance, evidence required.</a:t>
+            </a:r>
+            <a:endParaRPr lang="en-US" sz="1250" dirty="0"/>
+          </a:p>
+        </p:txBody>
+      </p:sp>
+      <p:sp>
+        <p:nvSpPr>
+          <p:cNvPr id="9" name="Shape 7"/>
           <p:cNvSpPr/>
           <p:nvPr/>
         </p:nvSpPr>
@@ -5520,7 +5598,7 @@
       </p:sp>
       <p:sp>
         <p:nvSpPr>
-          <p:cNvPr id="9" name="Text 7"/>
+          <p:cNvPr id="10" name="Text 8"/>
           <p:cNvSpPr/>
           <p:nvPr/>
         </p:nvSpPr>
@@ -5559,7 +5637,7 @@
       </p:sp>
       <p:sp>
         <p:nvSpPr>
-          <p:cNvPr id="10" name="Text 8"/>
+          <p:cNvPr id="11" name="Text 9"/>
           <p:cNvSpPr/>
           <p:nvPr/>
         </p:nvSpPr>
@@ -5798,7 +5876,7 @@
       </p:grpSpPr>
       <p:pic>
         <p:nvPicPr>
-          <p:cNvPr id="2" name="Image 0" descr="/private/tmp/claude-501/-Users-dogan-Documents-Vaults-Courses/a3a5132d-721f-4cd4-8ddd-e62e2b37b51b/scratchpad/img/crops/manet-olympia_a1777.jpg">    </p:cNvPr>
+          <p:cNvPr id="2" name="Image 0" descr="/Users/dogan/Documents/Vaults/Courses/wiki/classes/media-studies/decks/_build/img/crops/manet-olympia_a1777.jpg">    </p:cNvPr>
           <p:cNvPicPr>
             <a:picLocks noChangeAspect="1"/>
           </p:cNvPicPr>
